--- a/exec-deck/output/H&L Weekly Update - WC 5 Oct 2026.pptx
+++ b/exec-deck/output/H&L Weekly Update - WC 5 Oct 2026.pptx
@@ -53406,11 +53406,11 @@
         <p:spPr>
           <a:xfrm>
             <a:off x="7178040" y="2395728"/>
-            <a:ext cx="4599432" cy="3913632"/>
+            <a:ext cx="4599432" cy="2788920"/>
           </a:xfrm>
           <a:prstGeom prst="roundRect">
             <a:avLst>
-              <a:gd name="adj" fmla="val 1636"/>
+              <a:gd name="adj" fmla="val 2295"/>
             </a:avLst>
           </a:prstGeom>
           <a:solidFill>
@@ -53474,7 +53474,7 @@
         <p:spPr>
           <a:xfrm>
             <a:off x="7379208" y="2816352"/>
-            <a:ext cx="4187952" cy="3364992"/>
+            <a:ext cx="4187952" cy="2240280"/>
           </a:xfrm>
           <a:prstGeom prst="rect">
             <a:avLst/>
@@ -53673,6 +53673,559 @@
         </p:nvSpPr>
         <p:spPr>
           <a:xfrm>
+            <a:off x="7178040" y="5303520"/>
+            <a:ext cx="4599432" cy="1005840"/>
+          </a:xfrm>
+          <a:prstGeom prst="roundRect">
+            <a:avLst>
+              <a:gd name="adj" fmla="val 6364"/>
+            </a:avLst>
+          </a:prstGeom>
+          <a:solidFill>
+            <a:srgbClr val="FFFFFF"/>
+          </a:solidFill>
+          <a:ln/>
+          <a:effectLst>
+            <a:outerShdw sx="100000" sy="100000" kx="0" ky="0" algn="bl" rotWithShape="0" blurRad="76200" dist="25400" dir="5400000">
+              <a:srgbClr val="9AAAB5">
+                <a:alpha val="35000"/>
+              </a:srgbClr>
+            </a:outerShdw>
+          </a:effectLst>
+        </p:spPr>
+      </p:sp>
+      <p:sp>
+        <p:nvSpPr>
+          <p:cNvPr id="176" name="Text 174"/>
+          <p:cNvSpPr txBox="1"/>
+          <p:nvPr/>
+        </p:nvSpPr>
+        <p:spPr>
+          <a:xfrm>
+            <a:off x="7379208" y="5394960"/>
+            <a:ext cx="4197096" cy="201168"/>
+          </a:xfrm>
+          <a:prstGeom prst="rect">
+            <a:avLst/>
+          </a:prstGeom>
+          <a:noFill/>
+          <a:ln/>
+        </p:spPr>
+        <p:txBody>
+          <a:bodyPr wrap="square" lIns="0" tIns="0" rIns="0" bIns="0" rtlCol="0" anchor="ctr"/>
+          <a:lstStyle/>
+          <a:p>
+            <a:pPr indent="0" marL="0">
+              <a:buNone/>
+            </a:pPr>
+            <a:r>
+              <a:rPr lang="en-US" sz="950" b="1" dirty="0">
+                <a:solidFill>
+                  <a:srgbClr val="2C8394"/>
+                </a:solidFill>
+                <a:latin typeface="Poppins" pitchFamily="34" charset="0"/>
+                <a:ea typeface="Poppins" pitchFamily="34" charset="-122"/>
+                <a:cs typeface="Poppins" pitchFamily="34" charset="-120"/>
+              </a:rPr>
+              <a:t>WHERE THE 657 OPEN SIT   </a:t>
+            </a:r>
+            <a:pPr indent="0" marL="0">
+              <a:buNone/>
+            </a:pPr>
+            <a:r>
+              <a:rPr lang="en-US" sz="630" dirty="0">
+                <a:solidFill>
+                  <a:srgbClr val="8FA1AC"/>
+                </a:solidFill>
+                <a:latin typeface="Poppins" pitchFamily="34" charset="0"/>
+                <a:ea typeface="Poppins" pitchFamily="34" charset="-122"/>
+                <a:cs typeface="Poppins" pitchFamily="34" charset="-120"/>
+              </a:rPr>
+              <a:t>the two pending states are counted in</a:t>
+            </a:r>
+            <a:endParaRPr lang="en-US" sz="950" dirty="0"/>
+          </a:p>
+        </p:txBody>
+      </p:sp>
+      <p:sp>
+        <p:nvSpPr>
+          <p:cNvPr id="177" name="Shape 175"/>
+          <p:cNvSpPr/>
+          <p:nvPr/>
+        </p:nvSpPr>
+        <p:spPr>
+          <a:xfrm>
+            <a:off x="7379208" y="5632704"/>
+            <a:ext cx="1001268" cy="420624"/>
+          </a:xfrm>
+          <a:prstGeom prst="rect">
+            <a:avLst/>
+          </a:prstGeom>
+          <a:solidFill>
+            <a:srgbClr val="F2F6F8"/>
+          </a:solidFill>
+          <a:ln/>
+        </p:spPr>
+      </p:sp>
+      <p:sp>
+        <p:nvSpPr>
+          <p:cNvPr id="178" name="Text 176"/>
+          <p:cNvSpPr txBox="1"/>
+          <p:nvPr/>
+        </p:nvSpPr>
+        <p:spPr>
+          <a:xfrm>
+            <a:off x="7470648" y="5660136"/>
+            <a:ext cx="818388" cy="219456"/>
+          </a:xfrm>
+          <a:prstGeom prst="rect">
+            <a:avLst/>
+          </a:prstGeom>
+          <a:noFill/>
+          <a:ln/>
+        </p:spPr>
+        <p:txBody>
+          <a:bodyPr wrap="square" lIns="0" tIns="0" rIns="0" bIns="0" rtlCol="0" anchor="ctr"/>
+          <a:lstStyle/>
+          <a:p>
+            <a:pPr algn="ctr" indent="0" marL="0">
+              <a:buNone/>
+            </a:pPr>
+            <a:r>
+              <a:rPr lang="en-US" sz="1400" b="1" dirty="0">
+                <a:solidFill>
+                  <a:srgbClr val="12293A"/>
+                </a:solidFill>
+                <a:latin typeface="Poppins" pitchFamily="34" charset="0"/>
+                <a:ea typeface="Poppins" pitchFamily="34" charset="-122"/>
+                <a:cs typeface="Poppins" pitchFamily="34" charset="-120"/>
+              </a:rPr>
+              <a:t>529</a:t>
+            </a:r>
+            <a:endParaRPr lang="en-US" sz="1400" dirty="0"/>
+          </a:p>
+        </p:txBody>
+      </p:sp>
+      <p:sp>
+        <p:nvSpPr>
+          <p:cNvPr id="179" name="Text 177"/>
+          <p:cNvSpPr txBox="1"/>
+          <p:nvPr/>
+        </p:nvSpPr>
+        <p:spPr>
+          <a:xfrm>
+            <a:off x="7406640" y="5879592"/>
+            <a:ext cx="946404" cy="155448"/>
+          </a:xfrm>
+          <a:prstGeom prst="rect">
+            <a:avLst/>
+          </a:prstGeom>
+          <a:noFill/>
+          <a:ln/>
+        </p:spPr>
+        <p:txBody>
+          <a:bodyPr wrap="square" lIns="0" tIns="0" rIns="0" bIns="0" rtlCol="0" anchor="ctr"/>
+          <a:lstStyle/>
+          <a:p>
+            <a:pPr algn="ctr" indent="0" marL="0">
+              <a:buNone/>
+            </a:pPr>
+            <a:r>
+              <a:rPr lang="en-US" sz="620" b="1" dirty="0">
+                <a:solidFill>
+                  <a:srgbClr val="5E7280"/>
+                </a:solidFill>
+                <a:latin typeface="Poppins" pitchFamily="34" charset="0"/>
+                <a:ea typeface="Poppins" pitchFamily="34" charset="-122"/>
+                <a:cs typeface="Poppins" pitchFamily="34" charset="-120"/>
+              </a:rPr>
+              <a:t>NEW</a:t>
+            </a:r>
+            <a:endParaRPr lang="en-US" sz="620" dirty="0"/>
+          </a:p>
+        </p:txBody>
+      </p:sp>
+      <p:sp>
+        <p:nvSpPr>
+          <p:cNvPr id="180" name="Shape 178"/>
+          <p:cNvSpPr/>
+          <p:nvPr/>
+        </p:nvSpPr>
+        <p:spPr>
+          <a:xfrm>
+            <a:off x="8444484" y="5632704"/>
+            <a:ext cx="1001268" cy="420624"/>
+          </a:xfrm>
+          <a:prstGeom prst="rect">
+            <a:avLst/>
+          </a:prstGeom>
+          <a:solidFill>
+            <a:srgbClr val="F2F6F8"/>
+          </a:solidFill>
+          <a:ln/>
+        </p:spPr>
+      </p:sp>
+      <p:sp>
+        <p:nvSpPr>
+          <p:cNvPr id="181" name="Text 179"/>
+          <p:cNvSpPr txBox="1"/>
+          <p:nvPr/>
+        </p:nvSpPr>
+        <p:spPr>
+          <a:xfrm>
+            <a:off x="8535924" y="5660136"/>
+            <a:ext cx="818388" cy="219456"/>
+          </a:xfrm>
+          <a:prstGeom prst="rect">
+            <a:avLst/>
+          </a:prstGeom>
+          <a:noFill/>
+          <a:ln/>
+        </p:spPr>
+        <p:txBody>
+          <a:bodyPr wrap="square" lIns="0" tIns="0" rIns="0" bIns="0" rtlCol="0" anchor="ctr"/>
+          <a:lstStyle/>
+          <a:p>
+            <a:pPr algn="ctr" indent="0" marL="0">
+              <a:buNone/>
+            </a:pPr>
+            <a:r>
+              <a:rPr lang="en-US" sz="1400" b="1" dirty="0">
+                <a:solidFill>
+                  <a:srgbClr val="12293A"/>
+                </a:solidFill>
+                <a:latin typeface="Poppins" pitchFamily="34" charset="0"/>
+                <a:ea typeface="Poppins" pitchFamily="34" charset="-122"/>
+                <a:cs typeface="Poppins" pitchFamily="34" charset="-120"/>
+              </a:rPr>
+              <a:t>88</a:t>
+            </a:r>
+            <a:endParaRPr lang="en-US" sz="1400" dirty="0"/>
+          </a:p>
+        </p:txBody>
+      </p:sp>
+      <p:sp>
+        <p:nvSpPr>
+          <p:cNvPr id="182" name="Text 180"/>
+          <p:cNvSpPr txBox="1"/>
+          <p:nvPr/>
+        </p:nvSpPr>
+        <p:spPr>
+          <a:xfrm>
+            <a:off x="8471916" y="5879592"/>
+            <a:ext cx="946404" cy="155448"/>
+          </a:xfrm>
+          <a:prstGeom prst="rect">
+            <a:avLst/>
+          </a:prstGeom>
+          <a:noFill/>
+          <a:ln/>
+        </p:spPr>
+        <p:txBody>
+          <a:bodyPr wrap="square" lIns="0" tIns="0" rIns="0" bIns="0" rtlCol="0" anchor="ctr"/>
+          <a:lstStyle/>
+          <a:p>
+            <a:pPr algn="ctr" indent="0" marL="0">
+              <a:buNone/>
+            </a:pPr>
+            <a:r>
+              <a:rPr lang="en-US" sz="620" b="1" dirty="0">
+                <a:solidFill>
+                  <a:srgbClr val="5E7280"/>
+                </a:solidFill>
+                <a:latin typeface="Poppins" pitchFamily="34" charset="0"/>
+                <a:ea typeface="Poppins" pitchFamily="34" charset="-122"/>
+                <a:cs typeface="Poppins" pitchFamily="34" charset="-120"/>
+              </a:rPr>
+              <a:t>IN PROGRESS</a:t>
+            </a:r>
+            <a:endParaRPr lang="en-US" sz="620" dirty="0"/>
+          </a:p>
+        </p:txBody>
+      </p:sp>
+      <p:sp>
+        <p:nvSpPr>
+          <p:cNvPr id="183" name="Shape 181"/>
+          <p:cNvSpPr/>
+          <p:nvPr/>
+        </p:nvSpPr>
+        <p:spPr>
+          <a:xfrm>
+            <a:off x="9509760" y="5632704"/>
+            <a:ext cx="1001268" cy="420624"/>
+          </a:xfrm>
+          <a:prstGeom prst="rect">
+            <a:avLst/>
+          </a:prstGeom>
+          <a:solidFill>
+            <a:srgbClr val="F7EEDF"/>
+          </a:solidFill>
+          <a:ln/>
+        </p:spPr>
+      </p:sp>
+      <p:sp>
+        <p:nvSpPr>
+          <p:cNvPr id="184" name="Shape 182"/>
+          <p:cNvSpPr/>
+          <p:nvPr/>
+        </p:nvSpPr>
+        <p:spPr>
+          <a:xfrm>
+            <a:off x="9509760" y="5632704"/>
+            <a:ext cx="32004" cy="420624"/>
+          </a:xfrm>
+          <a:prstGeom prst="rect">
+            <a:avLst/>
+          </a:prstGeom>
+          <a:solidFill>
+            <a:srgbClr val="C88A2E"/>
+          </a:solidFill>
+          <a:ln/>
+        </p:spPr>
+      </p:sp>
+      <p:sp>
+        <p:nvSpPr>
+          <p:cNvPr id="185" name="Text 183"/>
+          <p:cNvSpPr txBox="1"/>
+          <p:nvPr/>
+        </p:nvSpPr>
+        <p:spPr>
+          <a:xfrm>
+            <a:off x="9601200" y="5660136"/>
+            <a:ext cx="818388" cy="219456"/>
+          </a:xfrm>
+          <a:prstGeom prst="rect">
+            <a:avLst/>
+          </a:prstGeom>
+          <a:noFill/>
+          <a:ln/>
+        </p:spPr>
+        <p:txBody>
+          <a:bodyPr wrap="square" lIns="0" tIns="0" rIns="0" bIns="0" rtlCol="0" anchor="ctr"/>
+          <a:lstStyle/>
+          <a:p>
+            <a:pPr algn="ctr" indent="0" marL="0">
+              <a:buNone/>
+            </a:pPr>
+            <a:r>
+              <a:rPr lang="en-US" sz="1400" b="1" dirty="0">
+                <a:solidFill>
+                  <a:srgbClr val="C88A2E"/>
+                </a:solidFill>
+                <a:latin typeface="Poppins" pitchFamily="34" charset="0"/>
+                <a:ea typeface="Poppins" pitchFamily="34" charset="-122"/>
+                <a:cs typeface="Poppins" pitchFamily="34" charset="-120"/>
+              </a:rPr>
+              <a:t>23</a:t>
+            </a:r>
+            <a:endParaRPr lang="en-US" sz="1400" dirty="0"/>
+          </a:p>
+        </p:txBody>
+      </p:sp>
+      <p:sp>
+        <p:nvSpPr>
+          <p:cNvPr id="186" name="Text 184"/>
+          <p:cNvSpPr txBox="1"/>
+          <p:nvPr/>
+        </p:nvSpPr>
+        <p:spPr>
+          <a:xfrm>
+            <a:off x="9537192" y="5879592"/>
+            <a:ext cx="946404" cy="155448"/>
+          </a:xfrm>
+          <a:prstGeom prst="rect">
+            <a:avLst/>
+          </a:prstGeom>
+          <a:noFill/>
+          <a:ln/>
+        </p:spPr>
+        <p:txBody>
+          <a:bodyPr wrap="square" lIns="0" tIns="0" rIns="0" bIns="0" rtlCol="0" anchor="ctr"/>
+          <a:lstStyle/>
+          <a:p>
+            <a:pPr algn="ctr" indent="0" marL="0">
+              <a:buNone/>
+            </a:pPr>
+            <a:r>
+              <a:rPr lang="en-US" sz="540" b="1" dirty="0">
+                <a:solidFill>
+                  <a:srgbClr val="C88A2E"/>
+                </a:solidFill>
+                <a:latin typeface="Poppins" pitchFamily="34" charset="0"/>
+                <a:ea typeface="Poppins" pitchFamily="34" charset="-122"/>
+                <a:cs typeface="Poppins" pitchFamily="34" charset="-120"/>
+              </a:rPr>
+              <a:t>PENDING INTERNAL</a:t>
+            </a:r>
+            <a:endParaRPr lang="en-US" sz="540" dirty="0"/>
+          </a:p>
+        </p:txBody>
+      </p:sp>
+      <p:sp>
+        <p:nvSpPr>
+          <p:cNvPr id="187" name="Shape 185"/>
+          <p:cNvSpPr/>
+          <p:nvPr/>
+        </p:nvSpPr>
+        <p:spPr>
+          <a:xfrm>
+            <a:off x="10575036" y="5632704"/>
+            <a:ext cx="1001268" cy="420624"/>
+          </a:xfrm>
+          <a:prstGeom prst="rect">
+            <a:avLst/>
+          </a:prstGeom>
+          <a:solidFill>
+            <a:srgbClr val="F7EEDF"/>
+          </a:solidFill>
+          <a:ln/>
+        </p:spPr>
+      </p:sp>
+      <p:sp>
+        <p:nvSpPr>
+          <p:cNvPr id="188" name="Shape 186"/>
+          <p:cNvSpPr/>
+          <p:nvPr/>
+        </p:nvSpPr>
+        <p:spPr>
+          <a:xfrm>
+            <a:off x="10575036" y="5632704"/>
+            <a:ext cx="32004" cy="420624"/>
+          </a:xfrm>
+          <a:prstGeom prst="rect">
+            <a:avLst/>
+          </a:prstGeom>
+          <a:solidFill>
+            <a:srgbClr val="C88A2E"/>
+          </a:solidFill>
+          <a:ln/>
+        </p:spPr>
+      </p:sp>
+      <p:sp>
+        <p:nvSpPr>
+          <p:cNvPr id="189" name="Text 187"/>
+          <p:cNvSpPr txBox="1"/>
+          <p:nvPr/>
+        </p:nvSpPr>
+        <p:spPr>
+          <a:xfrm>
+            <a:off x="10666476" y="5660136"/>
+            <a:ext cx="818388" cy="219456"/>
+          </a:xfrm>
+          <a:prstGeom prst="rect">
+            <a:avLst/>
+          </a:prstGeom>
+          <a:noFill/>
+          <a:ln/>
+        </p:spPr>
+        <p:txBody>
+          <a:bodyPr wrap="square" lIns="0" tIns="0" rIns="0" bIns="0" rtlCol="0" anchor="ctr"/>
+          <a:lstStyle/>
+          <a:p>
+            <a:pPr algn="ctr" indent="0" marL="0">
+              <a:buNone/>
+            </a:pPr>
+            <a:r>
+              <a:rPr lang="en-US" sz="1400" b="1" dirty="0">
+                <a:solidFill>
+                  <a:srgbClr val="C88A2E"/>
+                </a:solidFill>
+                <a:latin typeface="Poppins" pitchFamily="34" charset="0"/>
+                <a:ea typeface="Poppins" pitchFamily="34" charset="-122"/>
+                <a:cs typeface="Poppins" pitchFamily="34" charset="-120"/>
+              </a:rPr>
+              <a:t>18</a:t>
+            </a:r>
+            <a:endParaRPr lang="en-US" sz="1400" dirty="0"/>
+          </a:p>
+        </p:txBody>
+      </p:sp>
+      <p:sp>
+        <p:nvSpPr>
+          <p:cNvPr id="190" name="Text 188"/>
+          <p:cNvSpPr txBox="1"/>
+          <p:nvPr/>
+        </p:nvSpPr>
+        <p:spPr>
+          <a:xfrm>
+            <a:off x="10602468" y="5879592"/>
+            <a:ext cx="946404" cy="155448"/>
+          </a:xfrm>
+          <a:prstGeom prst="rect">
+            <a:avLst/>
+          </a:prstGeom>
+          <a:noFill/>
+          <a:ln/>
+        </p:spPr>
+        <p:txBody>
+          <a:bodyPr wrap="square" lIns="0" tIns="0" rIns="0" bIns="0" rtlCol="0" anchor="ctr"/>
+          <a:lstStyle/>
+          <a:p>
+            <a:pPr algn="ctr" indent="0" marL="0">
+              <a:buNone/>
+            </a:pPr>
+            <a:r>
+              <a:rPr lang="en-US" sz="540" b="1" dirty="0">
+                <a:solidFill>
+                  <a:srgbClr val="C88A2E"/>
+                </a:solidFill>
+                <a:latin typeface="Poppins" pitchFamily="34" charset="0"/>
+                <a:ea typeface="Poppins" pitchFamily="34" charset="-122"/>
+                <a:cs typeface="Poppins" pitchFamily="34" charset="-120"/>
+              </a:rPr>
+              <a:t>PENDING EXTERNAL</a:t>
+            </a:r>
+            <a:endParaRPr lang="en-US" sz="540" dirty="0"/>
+          </a:p>
+        </p:txBody>
+      </p:sp>
+      <p:sp>
+        <p:nvSpPr>
+          <p:cNvPr id="191" name="Text 189"/>
+          <p:cNvSpPr txBox="1"/>
+          <p:nvPr/>
+        </p:nvSpPr>
+        <p:spPr>
+          <a:xfrm>
+            <a:off x="7379208" y="6099048"/>
+            <a:ext cx="4197096" cy="274320"/>
+          </a:xfrm>
+          <a:prstGeom prst="rect">
+            <a:avLst/>
+          </a:prstGeom>
+          <a:noFill/>
+          <a:ln/>
+        </p:spPr>
+        <p:txBody>
+          <a:bodyPr wrap="square" lIns="0" tIns="0" rIns="0" bIns="0" rtlCol="0" anchor="t"/>
+          <a:lstStyle/>
+          <a:p>
+            <a:pPr indent="0" marL="0">
+              <a:buNone/>
+            </a:pPr>
+            <a:r>
+              <a:rPr lang="en-US" sz="640" dirty="0">
+                <a:solidFill>
+                  <a:srgbClr val="5E7280"/>
+                </a:solidFill>
+                <a:latin typeface="Poppins" pitchFamily="34" charset="0"/>
+                <a:ea typeface="Poppins" pitchFamily="34" charset="-122"/>
+                <a:cs typeface="Poppins" pitchFamily="34" charset="-120"/>
+              </a:rPr>
+              <a:t>Pending Internal and Pending External are inside the 657 — 41 tickets, 6% of it; exclude both and the backlog reads 616. The number to watch is the other end: 529 of 657, 81%, have never left New.</a:t>
+            </a:r>
+            <a:endParaRPr lang="en-US" sz="640" dirty="0"/>
+          </a:p>
+        </p:txBody>
+      </p:sp>
+      <p:sp>
+        <p:nvSpPr>
+          <p:cNvPr id="192" name="Shape 190"/>
+          <p:cNvSpPr/>
+          <p:nvPr/>
+        </p:nvSpPr>
+        <p:spPr>
+          <a:xfrm>
             <a:off x="8642909" y="6510528"/>
             <a:ext cx="3134563" cy="256032"/>
           </a:xfrm>
@@ -53689,7 +54242,7 @@
       </p:sp>
       <p:sp>
         <p:nvSpPr>
-          <p:cNvPr id="176" name="Text 174"/>
+          <p:cNvPr id="193" name="Text 191"/>
           <p:cNvSpPr txBox="1"/>
           <p:nvPr/>
         </p:nvSpPr>
